--- a/ゲーム科2年/01_後期/ゲームAI概論/01_AI管理とストラテジークラス.pptx
+++ b/ゲーム科2年/01_後期/ゲームAI概論/01_AI管理とストラテジークラス.pptx
@@ -3989,8 +3989,12 @@
           </a:p>
           <a:p>
             <a:r>
+              <a:rPr lang="ja-JP" altLang="en-US" sz="2400"/>
+              <a:t>のちほど実装</a:t>
+            </a:r>
+            <a:r>
               <a:rPr lang="ja-JP" altLang="en-US" sz="2400" dirty="0"/>
-              <a:t>次のスライドで実装します。</a:t>
+              <a:t>します。</a:t>
             </a:r>
             <a:endParaRPr kumimoji="1" lang="en-US" altLang="ja-JP" sz="2400" dirty="0"/>
           </a:p>
